--- a/docs/actividad-01/Presentacion_Actividad01.pptx
+++ b/docs/actividad-01/Presentacion_Actividad01.pptx
@@ -2649,7 +2649,7 @@
                   <a:schemeClr val="bg2"/>
                 </a:solidFill>
               </a:rPr>
-              <a:t>Integrantes: Daniela Cayo Mamani · [Integrante 2] · [Integrante 3]</a:t>
+              <a:t>Integrantes: Daniela Cayo Mamani · Juan Jose Vicente · Yordy Tolavi Ruiz · [Integrante 4] · [Integrante 5]</a:t>
             </a:r>
             <a:endParaRPr lang="en-US" sz="1400" dirty="0"/>
           </a:p>

--- a/docs/actividad-01/Presentacion_Actividad01.pptx
+++ b/docs/actividad-01/Presentacion_Actividad01.pptx
@@ -2649,7 +2649,7 @@
                   <a:schemeClr val="bg2"/>
                 </a:solidFill>
               </a:rPr>
-              <a:t>Integrantes: Daniela Cayo Mamani · Juan Jose Vicente · Yordy Tolavi Ruiz · [Integrante 4] · [Integrante 5]</a:t>
+              <a:t>Integrantes: Daniela Cayo Mamani · Juan Jose Vicente Cossio · Ronald Salvatierra Flores · Yordy Tolavi Ruiz · Alejandro Cadario Lopez</a:t>
             </a:r>
             <a:endParaRPr lang="en-US" sz="1400" dirty="0"/>
           </a:p>
